--- a/media/resources/files/Onduktardyn_Orunduk_Maanisi_Maga_Korsot_copy.pptx
+++ b/media/resources/files/Onduktardyn_Orunduk_Maanisi_Maga_Korsot_copy.pptx
@@ -3839,7 +3839,7 @@
                 <a:ea typeface="+mn-ea"/>
                 <a:cs typeface="+mn-cs"/>
               </a:rPr>
-              <a:t>Турдуу пикирлер учун ыраазычылык билдиребиз.</a:t>
+              <a:t>Түрдүү пикирлер үчүн ыраазычылык билдиребиз.</a:t>
             </a:r>
           </a:p>
           <a:p>
